--- a/slides/ARC3133_Class07.pptx
+++ b/slides/ARC3133_Class07.pptx
@@ -3757,7 +3757,7 @@
         <p:spPr>
           <a:xfrm>
             <a:off x="662940" y="1851660"/>
-            <a:ext cx="777240" cy="724204"/>
+            <a:ext cx="777240" cy="579120"/>
           </a:xfrm>
           <a:prstGeom prst="rect">
             <a:avLst/>
@@ -3801,7 +3801,7 @@
         <p:spPr>
           <a:xfrm>
             <a:off x="594360" y="1783080"/>
-            <a:ext cx="777240" cy="724204"/>
+            <a:ext cx="777240" cy="579120"/>
           </a:xfrm>
           <a:prstGeom prst="rect">
             <a:avLst/>
@@ -3844,7 +3844,7 @@
         </p:nvSpPr>
         <p:spPr>
           <a:xfrm>
-            <a:off x="594360" y="2044598"/>
+            <a:off x="594360" y="1972056"/>
             <a:ext cx="777240" cy="274320"/>
           </a:xfrm>
           <a:prstGeom prst="rect">
@@ -3880,7 +3880,7 @@
         <p:spPr>
           <a:xfrm>
             <a:off x="1714499" y="1851660"/>
-            <a:ext cx="9921240" cy="724204"/>
+            <a:ext cx="9921240" cy="579120"/>
           </a:xfrm>
           <a:prstGeom prst="rect">
             <a:avLst/>
@@ -3924,7 +3924,7 @@
         <p:spPr>
           <a:xfrm>
             <a:off x="1645919" y="1783080"/>
-            <a:ext cx="9921240" cy="724204"/>
+            <a:ext cx="9921240" cy="579120"/>
           </a:xfrm>
           <a:prstGeom prst="rect">
             <a:avLst/>
@@ -3968,7 +3968,7 @@
         <p:spPr>
           <a:xfrm>
             <a:off x="1920240" y="1874519"/>
-            <a:ext cx="9372600" cy="541324"/>
+            <a:ext cx="9372600" cy="396239"/>
           </a:xfrm>
           <a:prstGeom prst="rect">
             <a:avLst/>
@@ -3987,7 +3987,7 @@
               </a:lnSpc>
             </a:pPr>
             <a:r>
-              <a:rPr sz="1300">
+              <a:rPr sz="1200">
                 <a:solidFill>
                   <a:srgbClr val="000000"/>
                 </a:solidFill>
@@ -4006,8 +4006,8 @@
         </p:nvSpPr>
         <p:spPr>
           <a:xfrm>
-            <a:off x="662940" y="2722168"/>
-            <a:ext cx="777240" cy="724204"/>
+            <a:off x="662940" y="2577084"/>
+            <a:ext cx="777240" cy="579120"/>
           </a:xfrm>
           <a:prstGeom prst="rect">
             <a:avLst/>
@@ -4050,8 +4050,8 @@
         </p:nvSpPr>
         <p:spPr>
           <a:xfrm>
-            <a:off x="594360" y="2653588"/>
-            <a:ext cx="777240" cy="724204"/>
+            <a:off x="594360" y="2508504"/>
+            <a:ext cx="777240" cy="579120"/>
           </a:xfrm>
           <a:prstGeom prst="rect">
             <a:avLst/>
@@ -4094,7 +4094,7 @@
         </p:nvSpPr>
         <p:spPr>
           <a:xfrm>
-            <a:off x="594360" y="2915107"/>
+            <a:off x="594360" y="2697479"/>
             <a:ext cx="777240" cy="274320"/>
           </a:xfrm>
           <a:prstGeom prst="rect">
@@ -4129,8 +4129,8 @@
         </p:nvSpPr>
         <p:spPr>
           <a:xfrm>
-            <a:off x="1714499" y="2722168"/>
-            <a:ext cx="9921240" cy="724204"/>
+            <a:off x="1714499" y="2577084"/>
+            <a:ext cx="9921240" cy="579120"/>
           </a:xfrm>
           <a:prstGeom prst="rect">
             <a:avLst/>
@@ -4173,8 +4173,8 @@
         </p:nvSpPr>
         <p:spPr>
           <a:xfrm>
-            <a:off x="1645919" y="2653588"/>
-            <a:ext cx="9921240" cy="724204"/>
+            <a:off x="1645919" y="2508504"/>
+            <a:ext cx="9921240" cy="579120"/>
           </a:xfrm>
           <a:prstGeom prst="rect">
             <a:avLst/>
@@ -4217,8 +4217,8 @@
         </p:nvSpPr>
         <p:spPr>
           <a:xfrm>
-            <a:off x="1920240" y="2745028"/>
-            <a:ext cx="9372600" cy="541324"/>
+            <a:off x="1920240" y="2599944"/>
+            <a:ext cx="9372600" cy="396239"/>
           </a:xfrm>
           <a:prstGeom prst="rect">
             <a:avLst/>
@@ -4237,7 +4237,7 @@
               </a:lnSpc>
             </a:pPr>
             <a:r>
-              <a:rPr sz="1300">
+              <a:rPr sz="1200">
                 <a:solidFill>
                   <a:srgbClr val="000000"/>
                 </a:solidFill>
@@ -4256,8 +4256,8 @@
         </p:nvSpPr>
         <p:spPr>
           <a:xfrm>
-            <a:off x="662940" y="3592677"/>
-            <a:ext cx="777240" cy="724204"/>
+            <a:off x="662940" y="3302508"/>
+            <a:ext cx="777240" cy="579120"/>
           </a:xfrm>
           <a:prstGeom prst="rect">
             <a:avLst/>
@@ -4300,8 +4300,8 @@
         </p:nvSpPr>
         <p:spPr>
           <a:xfrm>
-            <a:off x="594360" y="3524097"/>
-            <a:ext cx="777240" cy="724204"/>
+            <a:off x="594360" y="3233928"/>
+            <a:ext cx="777240" cy="579120"/>
           </a:xfrm>
           <a:prstGeom prst="rect">
             <a:avLst/>
@@ -4344,7 +4344,7 @@
         </p:nvSpPr>
         <p:spPr>
           <a:xfrm>
-            <a:off x="594360" y="3785615"/>
+            <a:off x="594360" y="3422904"/>
             <a:ext cx="777240" cy="274320"/>
           </a:xfrm>
           <a:prstGeom prst="rect">
@@ -4379,8 +4379,8 @@
         </p:nvSpPr>
         <p:spPr>
           <a:xfrm>
-            <a:off x="1714499" y="3592677"/>
-            <a:ext cx="9921240" cy="724204"/>
+            <a:off x="1714499" y="3302508"/>
+            <a:ext cx="9921240" cy="579120"/>
           </a:xfrm>
           <a:prstGeom prst="rect">
             <a:avLst/>
@@ -4423,8 +4423,8 @@
         </p:nvSpPr>
         <p:spPr>
           <a:xfrm>
-            <a:off x="1645919" y="3524097"/>
-            <a:ext cx="9921240" cy="724204"/>
+            <a:off x="1645919" y="3233928"/>
+            <a:ext cx="9921240" cy="579120"/>
           </a:xfrm>
           <a:prstGeom prst="rect">
             <a:avLst/>
@@ -4467,8 +4467,8 @@
         </p:nvSpPr>
         <p:spPr>
           <a:xfrm>
-            <a:off x="1920240" y="3615537"/>
-            <a:ext cx="9372600" cy="541324"/>
+            <a:off x="1920240" y="3325368"/>
+            <a:ext cx="9372600" cy="396239"/>
           </a:xfrm>
           <a:prstGeom prst="rect">
             <a:avLst/>
@@ -4487,7 +4487,7 @@
               </a:lnSpc>
             </a:pPr>
             <a:r>
-              <a:rPr sz="1300">
+              <a:rPr sz="1200">
                 <a:solidFill>
                   <a:srgbClr val="000000"/>
                 </a:solidFill>
@@ -4506,8 +4506,8 @@
         </p:nvSpPr>
         <p:spPr>
           <a:xfrm>
-            <a:off x="662940" y="4463186"/>
-            <a:ext cx="777240" cy="724204"/>
+            <a:off x="662940" y="4027932"/>
+            <a:ext cx="777240" cy="579120"/>
           </a:xfrm>
           <a:prstGeom prst="rect">
             <a:avLst/>
@@ -4550,8 +4550,8 @@
         </p:nvSpPr>
         <p:spPr>
           <a:xfrm>
-            <a:off x="594360" y="4394606"/>
-            <a:ext cx="777240" cy="724204"/>
+            <a:off x="594360" y="3959352"/>
+            <a:ext cx="777240" cy="579120"/>
           </a:xfrm>
           <a:prstGeom prst="rect">
             <a:avLst/>
@@ -4594,7 +4594,7 @@
         </p:nvSpPr>
         <p:spPr>
           <a:xfrm>
-            <a:off x="594360" y="4656124"/>
+            <a:off x="594360" y="4148328"/>
             <a:ext cx="777240" cy="274320"/>
           </a:xfrm>
           <a:prstGeom prst="rect">
@@ -4629,8 +4629,8 @@
         </p:nvSpPr>
         <p:spPr>
           <a:xfrm>
-            <a:off x="1714499" y="4463186"/>
-            <a:ext cx="9921240" cy="724204"/>
+            <a:off x="1714499" y="4027932"/>
+            <a:ext cx="9921240" cy="579120"/>
           </a:xfrm>
           <a:prstGeom prst="rect">
             <a:avLst/>
@@ -4673,8 +4673,8 @@
         </p:nvSpPr>
         <p:spPr>
           <a:xfrm>
-            <a:off x="1645919" y="4394606"/>
-            <a:ext cx="9921240" cy="724204"/>
+            <a:off x="1645919" y="3959352"/>
+            <a:ext cx="9921240" cy="579120"/>
           </a:xfrm>
           <a:prstGeom prst="rect">
             <a:avLst/>
@@ -4717,8 +4717,8 @@
         </p:nvSpPr>
         <p:spPr>
           <a:xfrm>
-            <a:off x="1920240" y="4486046"/>
-            <a:ext cx="9372600" cy="541324"/>
+            <a:off x="1920240" y="4050791"/>
+            <a:ext cx="9372600" cy="396239"/>
           </a:xfrm>
           <a:prstGeom prst="rect">
             <a:avLst/>
@@ -4737,7 +4737,7 @@
               </a:lnSpc>
             </a:pPr>
             <a:r>
-              <a:rPr sz="1300">
+              <a:rPr sz="1200">
                 <a:solidFill>
                   <a:srgbClr val="000000"/>
                 </a:solidFill>
@@ -4756,8 +4756,8 @@
         </p:nvSpPr>
         <p:spPr>
           <a:xfrm>
-            <a:off x="662940" y="5333695"/>
-            <a:ext cx="777240" cy="724204"/>
+            <a:off x="662940" y="4753356"/>
+            <a:ext cx="777240" cy="579120"/>
           </a:xfrm>
           <a:prstGeom prst="rect">
             <a:avLst/>
@@ -4800,8 +4800,8 @@
         </p:nvSpPr>
         <p:spPr>
           <a:xfrm>
-            <a:off x="594360" y="5265115"/>
-            <a:ext cx="777240" cy="724204"/>
+            <a:off x="594360" y="4684776"/>
+            <a:ext cx="777240" cy="579120"/>
           </a:xfrm>
           <a:prstGeom prst="rect">
             <a:avLst/>
@@ -4844,7 +4844,7 @@
         </p:nvSpPr>
         <p:spPr>
           <a:xfrm>
-            <a:off x="594360" y="5526633"/>
+            <a:off x="594360" y="4873752"/>
             <a:ext cx="777240" cy="274320"/>
           </a:xfrm>
           <a:prstGeom prst="rect">
@@ -4879,8 +4879,8 @@
         </p:nvSpPr>
         <p:spPr>
           <a:xfrm>
-            <a:off x="1714499" y="5333695"/>
-            <a:ext cx="9921240" cy="724204"/>
+            <a:off x="1714499" y="4753356"/>
+            <a:ext cx="9921240" cy="579120"/>
           </a:xfrm>
           <a:prstGeom prst="rect">
             <a:avLst/>
@@ -4923,8 +4923,8 @@
         </p:nvSpPr>
         <p:spPr>
           <a:xfrm>
-            <a:off x="1645919" y="5265115"/>
-            <a:ext cx="9921240" cy="724204"/>
+            <a:off x="1645919" y="4684776"/>
+            <a:ext cx="9921240" cy="579120"/>
           </a:xfrm>
           <a:prstGeom prst="rect">
             <a:avLst/>
@@ -4967,8 +4967,8 @@
         </p:nvSpPr>
         <p:spPr>
           <a:xfrm>
-            <a:off x="1920240" y="5356555"/>
-            <a:ext cx="9372600" cy="541324"/>
+            <a:off x="1920240" y="4776215"/>
+            <a:ext cx="9372600" cy="396239"/>
           </a:xfrm>
           <a:prstGeom prst="rect">
             <a:avLst/>
@@ -4987,13 +4987,263 @@
               </a:lnSpc>
             </a:pPr>
             <a:r>
-              <a:rPr sz="1300">
+              <a:rPr sz="1200">
                 <a:solidFill>
                   <a:srgbClr val="000000"/>
                 </a:solidFill>
                 <a:latin typeface="Calibri"/>
               </a:rPr>
-              <a:t>Build repetition from basic nodes and begin with a count you can inspect; there is no minimum element count. One conditional (index-range) selection is encouraged on either sheet.</a:t>
+              <a:t>Build repetition from basic nodes and begin with a count you can inspect; there is no minimum element count.</a:t>
+            </a:r>
+          </a:p>
+        </p:txBody>
+      </p:sp>
+      <p:sp>
+        <p:nvSpPr>
+          <p:cNvPr id="35" name="Rectangle 34"/>
+          <p:cNvSpPr/>
+          <p:nvPr/>
+        </p:nvSpPr>
+        <p:spPr>
+          <a:xfrm>
+            <a:off x="662940" y="5478780"/>
+            <a:ext cx="777240" cy="579120"/>
+          </a:xfrm>
+          <a:prstGeom prst="rect">
+            <a:avLst/>
+          </a:prstGeom>
+          <a:solidFill>
+            <a:srgbClr val="000000"/>
+          </a:solidFill>
+          <a:ln w="6350">
+            <a:solidFill>
+              <a:srgbClr val="000000"/>
+            </a:solidFill>
+          </a:ln>
+          <a:effectLst/>
+        </p:spPr>
+        <p:style>
+          <a:lnRef idx="1">
+            <a:schemeClr val="accent1"/>
+          </a:lnRef>
+          <a:fillRef idx="3">
+            <a:schemeClr val="accent1"/>
+          </a:fillRef>
+          <a:effectRef idx="2">
+            <a:schemeClr val="accent1"/>
+          </a:effectRef>
+          <a:fontRef idx="minor">
+            <a:schemeClr val="lt1"/>
+          </a:fontRef>
+        </p:style>
+        <p:txBody>
+          <a:bodyPr rtlCol="0" anchor="ctr"/>
+          <a:lstStyle/>
+          <a:p/>
+        </p:txBody>
+      </p:sp>
+      <p:sp>
+        <p:nvSpPr>
+          <p:cNvPr id="36" name="Rectangle 35"/>
+          <p:cNvSpPr/>
+          <p:nvPr/>
+        </p:nvSpPr>
+        <p:spPr>
+          <a:xfrm>
+            <a:off x="594360" y="5410199"/>
+            <a:ext cx="777240" cy="579120"/>
+          </a:xfrm>
+          <a:prstGeom prst="rect">
+            <a:avLst/>
+          </a:prstGeom>
+          <a:solidFill>
+            <a:srgbClr val="C6F035"/>
+          </a:solidFill>
+          <a:ln w="34925">
+            <a:solidFill>
+              <a:srgbClr val="000000"/>
+            </a:solidFill>
+          </a:ln>
+          <a:effectLst/>
+        </p:spPr>
+        <p:style>
+          <a:lnRef idx="1">
+            <a:schemeClr val="accent1"/>
+          </a:lnRef>
+          <a:fillRef idx="3">
+            <a:schemeClr val="accent1"/>
+          </a:fillRef>
+          <a:effectRef idx="2">
+            <a:schemeClr val="accent1"/>
+          </a:effectRef>
+          <a:fontRef idx="minor">
+            <a:schemeClr val="lt1"/>
+          </a:fontRef>
+        </p:style>
+        <p:txBody>
+          <a:bodyPr rtlCol="0" anchor="ctr"/>
+          <a:lstStyle/>
+          <a:p/>
+        </p:txBody>
+      </p:sp>
+      <p:sp>
+        <p:nvSpPr>
+          <p:cNvPr id="37" name="TextBox 36"/>
+          <p:cNvSpPr txBox="1"/>
+          <p:nvPr/>
+        </p:nvSpPr>
+        <p:spPr>
+          <a:xfrm>
+            <a:off x="594360" y="5599176"/>
+            <a:ext cx="777240" cy="274320"/>
+          </a:xfrm>
+          <a:prstGeom prst="rect">
+            <a:avLst/>
+          </a:prstGeom>
+          <a:noFill/>
+        </p:spPr>
+        <p:txBody>
+          <a:bodyPr wrap="square" lIns="0" rIns="0" tIns="0" bIns="0" anchor="t">
+            <a:spAutoFit/>
+          </a:bodyPr>
+          <a:lstStyle/>
+          <a:p>
+            <a:pPr algn="ctr"/>
+            <a:r>
+              <a:rPr sz="1500" b="1">
+                <a:solidFill>
+                  <a:srgbClr val="000000"/>
+                </a:solidFill>
+                <a:latin typeface="Arial"/>
+              </a:rPr>
+              <a:t>06</a:t>
+            </a:r>
+          </a:p>
+        </p:txBody>
+      </p:sp>
+      <p:sp>
+        <p:nvSpPr>
+          <p:cNvPr id="38" name="Rectangle 37"/>
+          <p:cNvSpPr/>
+          <p:nvPr/>
+        </p:nvSpPr>
+        <p:spPr>
+          <a:xfrm>
+            <a:off x="1714499" y="5478780"/>
+            <a:ext cx="9921240" cy="579120"/>
+          </a:xfrm>
+          <a:prstGeom prst="rect">
+            <a:avLst/>
+          </a:prstGeom>
+          <a:solidFill>
+            <a:srgbClr val="000000"/>
+          </a:solidFill>
+          <a:ln w="6350">
+            <a:solidFill>
+              <a:srgbClr val="000000"/>
+            </a:solidFill>
+          </a:ln>
+          <a:effectLst/>
+        </p:spPr>
+        <p:style>
+          <a:lnRef idx="1">
+            <a:schemeClr val="accent1"/>
+          </a:lnRef>
+          <a:fillRef idx="3">
+            <a:schemeClr val="accent1"/>
+          </a:fillRef>
+          <a:effectRef idx="2">
+            <a:schemeClr val="accent1"/>
+          </a:effectRef>
+          <a:fontRef idx="minor">
+            <a:schemeClr val="lt1"/>
+          </a:fontRef>
+        </p:style>
+        <p:txBody>
+          <a:bodyPr rtlCol="0" anchor="ctr"/>
+          <a:lstStyle/>
+          <a:p/>
+        </p:txBody>
+      </p:sp>
+      <p:sp>
+        <p:nvSpPr>
+          <p:cNvPr id="39" name="Rectangle 38"/>
+          <p:cNvSpPr/>
+          <p:nvPr/>
+        </p:nvSpPr>
+        <p:spPr>
+          <a:xfrm>
+            <a:off x="1645919" y="5410199"/>
+            <a:ext cx="9921240" cy="579120"/>
+          </a:xfrm>
+          <a:prstGeom prst="rect">
+            <a:avLst/>
+          </a:prstGeom>
+          <a:solidFill>
+            <a:srgbClr val="FFFDF7"/>
+          </a:solidFill>
+          <a:ln w="34925">
+            <a:solidFill>
+              <a:srgbClr val="000000"/>
+            </a:solidFill>
+          </a:ln>
+          <a:effectLst/>
+        </p:spPr>
+        <p:style>
+          <a:lnRef idx="1">
+            <a:schemeClr val="accent1"/>
+          </a:lnRef>
+          <a:fillRef idx="3">
+            <a:schemeClr val="accent1"/>
+          </a:fillRef>
+          <a:effectRef idx="2">
+            <a:schemeClr val="accent1"/>
+          </a:effectRef>
+          <a:fontRef idx="minor">
+            <a:schemeClr val="lt1"/>
+          </a:fontRef>
+        </p:style>
+        <p:txBody>
+          <a:bodyPr rtlCol="0" anchor="ctr"/>
+          <a:lstStyle/>
+          <a:p/>
+        </p:txBody>
+      </p:sp>
+      <p:sp>
+        <p:nvSpPr>
+          <p:cNvPr id="40" name="TextBox 39"/>
+          <p:cNvSpPr txBox="1"/>
+          <p:nvPr/>
+        </p:nvSpPr>
+        <p:spPr>
+          <a:xfrm>
+            <a:off x="1920240" y="5501639"/>
+            <a:ext cx="9372600" cy="396239"/>
+          </a:xfrm>
+          <a:prstGeom prst="rect">
+            <a:avLst/>
+          </a:prstGeom>
+          <a:noFill/>
+        </p:spPr>
+        <p:txBody>
+          <a:bodyPr wrap="square" lIns="0" rIns="0" tIns="0" bIns="0" anchor="ctr">
+            <a:spAutoFit/>
+          </a:bodyPr>
+          <a:lstStyle/>
+          <a:p>
+            <a:pPr algn="l">
+              <a:lnSpc>
+                <a:spcPct val="125000"/>
+              </a:lnSpc>
+            </a:pPr>
+            <a:r>
+              <a:rPr sz="1200">
+                <a:solidFill>
+                  <a:srgbClr val="000000"/>
+                </a:solidFill>
+                <a:latin typeface="Calibri"/>
+              </a:rPr>
+              <a:t>Include one conditional selection on either sheet. State its rule (for example, indices 3–5 lift by 0.5) and show the array before and after it applies.</a:t>
             </a:r>
           </a:p>
         </p:txBody>
@@ -6363,7 +6613,7 @@
                 </a:solidFill>
                 <a:latin typeface="Calibri"/>
               </a:rPr>
-              <a:t>Sheet 1 reviewed at your desk — count, spacing, index order labelled</a:t>
+              <a:t>Sheet 1 reviewed — labels in place, and one conditional selection with its rule stated</a:t>
             </a:r>
           </a:p>
         </p:txBody>
@@ -7591,7 +7841,7 @@
                 </a:solidFill>
                 <a:latin typeface="Calibri"/>
               </a:rPr>
-              <a:t>P2b — the printed object and its process sheet are due at the midterm, WEEK 10 — Oct 27. If it is not queued yet, queue it now.</a:t>
+              <a:t>P2b — the printed object and its process sheet are due at the mid-semester deadline, WEEK 10 — Oct 27. If it is not queued yet, queue it now.</a:t>
             </a:r>
           </a:p>
         </p:txBody>
